--- a/lectures/week_5_tests/le_5_tests.pptx
+++ b/lectures/week_5_tests/le_5_tests.pptx
@@ -5,7 +5,7 @@
     <p:sldMasterId id="2147483648" r:id="rId1"/>
   </p:sldMasterIdLst>
   <p:notesMasterIdLst>
-    <p:notesMasterId r:id="rId39"/>
+    <p:notesMasterId r:id="rId38"/>
   </p:notesMasterIdLst>
   <p:sldIdLst>
     <p:sldId id="256" r:id="rId2"/>
@@ -40,11 +40,10 @@
     <p:sldId id="296" r:id="rId31"/>
     <p:sldId id="297" r:id="rId32"/>
     <p:sldId id="274" r:id="rId33"/>
-    <p:sldId id="308" r:id="rId34"/>
-    <p:sldId id="275" r:id="rId35"/>
-    <p:sldId id="299" r:id="rId36"/>
-    <p:sldId id="304" r:id="rId37"/>
-    <p:sldId id="303" r:id="rId38"/>
+    <p:sldId id="275" r:id="rId34"/>
+    <p:sldId id="299" r:id="rId35"/>
+    <p:sldId id="304" r:id="rId36"/>
+    <p:sldId id="303" r:id="rId37"/>
   </p:sldIdLst>
   <p:sldSz cx="12192000" cy="6858000"/>
   <p:notesSz cx="6858000" cy="9144000"/>
@@ -233,7 +232,7 @@
           <a:p>
             <a:fld id="{6EBC5869-D15C-3840-B050-90A5C35E6518}" type="datetimeFigureOut">
               <a:rPr lang="en-US" smtClean="0"/>
-              <a:t>2/15/24</a:t>
+              <a:t>2/24/26</a:t>
             </a:fld>
             <a:endParaRPr lang="en-US"/>
           </a:p>
@@ -1100,7 +1099,7 @@
           <a:p>
             <a:fld id="{3FFC207A-36A1-3243-A33F-1510AFB24BC1}" type="slidenum">
               <a:rPr lang="en-US" smtClean="0"/>
-              <a:t>36</a:t>
+              <a:t>35</a:t>
             </a:fld>
             <a:endParaRPr lang="en-US"/>
           </a:p>
@@ -1248,7 +1247,7 @@
           <a:p>
             <a:fld id="{7D5693D1-C5E8-7D40-8B0E-476CF8AD55E4}" type="datetimeFigureOut">
               <a:rPr lang="en-US" smtClean="0"/>
-              <a:t>2/15/24</a:t>
+              <a:t>2/24/26</a:t>
             </a:fld>
             <a:endParaRPr lang="en-US"/>
           </a:p>
@@ -1416,7 +1415,7 @@
           <a:p>
             <a:fld id="{7D5693D1-C5E8-7D40-8B0E-476CF8AD55E4}" type="datetimeFigureOut">
               <a:rPr lang="en-US" smtClean="0"/>
-              <a:t>2/15/24</a:t>
+              <a:t>2/24/26</a:t>
             </a:fld>
             <a:endParaRPr lang="en-US"/>
           </a:p>
@@ -1594,7 +1593,7 @@
           <a:p>
             <a:fld id="{7D5693D1-C5E8-7D40-8B0E-476CF8AD55E4}" type="datetimeFigureOut">
               <a:rPr lang="en-US" smtClean="0"/>
-              <a:t>2/15/24</a:t>
+              <a:t>2/24/26</a:t>
             </a:fld>
             <a:endParaRPr lang="en-US"/>
           </a:p>
@@ -1762,7 +1761,7 @@
           <a:p>
             <a:fld id="{7D5693D1-C5E8-7D40-8B0E-476CF8AD55E4}" type="datetimeFigureOut">
               <a:rPr lang="en-US" smtClean="0"/>
-              <a:t>2/15/24</a:t>
+              <a:t>2/24/26</a:t>
             </a:fld>
             <a:endParaRPr lang="en-US"/>
           </a:p>
@@ -2007,7 +2006,7 @@
           <a:p>
             <a:fld id="{7D5693D1-C5E8-7D40-8B0E-476CF8AD55E4}" type="datetimeFigureOut">
               <a:rPr lang="en-US" smtClean="0"/>
-              <a:t>2/15/24</a:t>
+              <a:t>2/24/26</a:t>
             </a:fld>
             <a:endParaRPr lang="en-US"/>
           </a:p>
@@ -2236,7 +2235,7 @@
           <a:p>
             <a:fld id="{7D5693D1-C5E8-7D40-8B0E-476CF8AD55E4}" type="datetimeFigureOut">
               <a:rPr lang="en-US" smtClean="0"/>
-              <a:t>2/15/24</a:t>
+              <a:t>2/24/26</a:t>
             </a:fld>
             <a:endParaRPr lang="en-US"/>
           </a:p>
@@ -2600,7 +2599,7 @@
           <a:p>
             <a:fld id="{7D5693D1-C5E8-7D40-8B0E-476CF8AD55E4}" type="datetimeFigureOut">
               <a:rPr lang="en-US" smtClean="0"/>
-              <a:t>2/15/24</a:t>
+              <a:t>2/24/26</a:t>
             </a:fld>
             <a:endParaRPr lang="en-US"/>
           </a:p>
@@ -2717,7 +2716,7 @@
           <a:p>
             <a:fld id="{7D5693D1-C5E8-7D40-8B0E-476CF8AD55E4}" type="datetimeFigureOut">
               <a:rPr lang="en-US" smtClean="0"/>
-              <a:t>2/15/24</a:t>
+              <a:t>2/24/26</a:t>
             </a:fld>
             <a:endParaRPr lang="en-US"/>
           </a:p>
@@ -2812,7 +2811,7 @@
           <a:p>
             <a:fld id="{7D5693D1-C5E8-7D40-8B0E-476CF8AD55E4}" type="datetimeFigureOut">
               <a:rPr lang="en-US" smtClean="0"/>
-              <a:t>2/15/24</a:t>
+              <a:t>2/24/26</a:t>
             </a:fld>
             <a:endParaRPr lang="en-US"/>
           </a:p>
@@ -3087,7 +3086,7 @@
           <a:p>
             <a:fld id="{7D5693D1-C5E8-7D40-8B0E-476CF8AD55E4}" type="datetimeFigureOut">
               <a:rPr lang="en-US" smtClean="0"/>
-              <a:t>2/15/24</a:t>
+              <a:t>2/24/26</a:t>
             </a:fld>
             <a:endParaRPr lang="en-US"/>
           </a:p>
@@ -3339,7 +3338,7 @@
           <a:p>
             <a:fld id="{7D5693D1-C5E8-7D40-8B0E-476CF8AD55E4}" type="datetimeFigureOut">
               <a:rPr lang="en-US" smtClean="0"/>
-              <a:t>2/15/24</a:t>
+              <a:t>2/24/26</a:t>
             </a:fld>
             <a:endParaRPr lang="en-US"/>
           </a:p>
@@ -3550,7 +3549,7 @@
           <a:p>
             <a:fld id="{7D5693D1-C5E8-7D40-8B0E-476CF8AD55E4}" type="datetimeFigureOut">
               <a:rPr lang="en-US" smtClean="0"/>
-              <a:t>2/15/24</a:t>
+              <a:t>2/24/26</a:t>
             </a:fld>
             <a:endParaRPr lang="en-US"/>
           </a:p>
@@ -5369,7 +5368,7 @@
         <p:spPr/>
         <p:txBody>
           <a:bodyPr>
-            <a:normAutofit fontScale="92500" lnSpcReduction="20000"/>
+            <a:normAutofit/>
           </a:bodyPr>
           <a:lstStyle/>
           <a:p>
@@ -5382,41 +5381,25 @@
             <a:pPr lvl="1"/>
             <a:r>
               <a:rPr lang="en-US" dirty="0"/>
-              <a:t>Tues Feb 20</a:t>
-            </a:r>
-            <a:r>
-              <a:rPr lang="en-US" baseline="30000" dirty="0"/>
-              <a:t>st</a:t>
-            </a:r>
-            <a:r>
-              <a:rPr lang="en-US" dirty="0"/>
-              <a:t>: Distributions; Thursday Feb 22nd : Exercise &amp; Practice, No assignment! Quiz!</a:t>
+              <a:t>Tues Feb 24: Tests; Thursday Feb 26 : Test practice</a:t>
             </a:r>
           </a:p>
           <a:p>
             <a:pPr lvl="1"/>
             <a:r>
               <a:rPr lang="en-US" dirty="0"/>
-              <a:t>Tues Feb 27th </a:t>
+              <a:t>Tues Mar 3 </a:t>
             </a:r>
             <a:r>
               <a:rPr lang="en-US" b="1" dirty="0"/>
-              <a:t>ARC Computing – High performance Computing</a:t>
+              <a:t>– Guest lecture - Distributions</a:t>
             </a:r>
           </a:p>
           <a:p>
             <a:pPr lvl="1"/>
             <a:r>
               <a:rPr lang="en-US" b="1" dirty="0"/>
-              <a:t>Thurs Feb 29</a:t>
-            </a:r>
-            <a:r>
-              <a:rPr lang="en-US" b="1" baseline="30000" dirty="0"/>
-              <a:t>th</a:t>
-            </a:r>
-            <a:r>
-              <a:rPr lang="en-US" b="1" dirty="0"/>
-              <a:t> – No class!!!!!!</a:t>
+              <a:t>Thurs Mar 5 – No class!!!!!!</a:t>
             </a:r>
           </a:p>
           <a:p>
@@ -5452,53 +5435,8 @@
             <a:pPr lvl="1"/>
             <a:r>
               <a:rPr lang="en-US" dirty="0"/>
-              <a:t>March 5 &amp; 7 – Spring Break, No class</a:t>
-            </a:r>
-          </a:p>
-          <a:p>
-            <a:pPr lvl="1"/>
-            <a:r>
-              <a:rPr lang="en-US" dirty="0"/>
-              <a:t>Tuesday Mar 12</a:t>
-            </a:r>
-            <a:r>
-              <a:rPr lang="en-US" baseline="30000" dirty="0"/>
-              <a:t>th</a:t>
-            </a:r>
-            <a:r>
-              <a:rPr lang="en-US" dirty="0"/>
-              <a:t>: </a:t>
-            </a:r>
-            <a:r>
-              <a:rPr lang="en-US" b="1" u="sng" dirty="0"/>
-              <a:t>recorded lecture on linear models. Watch on your own. </a:t>
-            </a:r>
-          </a:p>
-          <a:p>
-            <a:pPr lvl="2"/>
-            <a:r>
-              <a:rPr lang="en-US" b="1" u="sng" dirty="0"/>
-              <a:t>IMPORTANT: KATE IS UPDATING THIS LECTURE – DO NOT GET TOO FAR AHEAD!</a:t>
-            </a:r>
-          </a:p>
-          <a:p>
-            <a:pPr lvl="1"/>
-            <a:r>
-              <a:rPr lang="en-US" dirty="0"/>
-              <a:t>Thurs Mar 14</a:t>
-            </a:r>
-            <a:r>
-              <a:rPr lang="en-US" baseline="30000" dirty="0"/>
-              <a:t>th</a:t>
-            </a:r>
-            <a:r>
-              <a:rPr lang="en-US" dirty="0"/>
-              <a:t>: meet at usual to practice what you learned on Tuesday</a:t>
-            </a:r>
-            <a:br>
-              <a:rPr lang="en-US" b="1" u="sng" dirty="0"/>
-            </a:br>
-            <a:endParaRPr lang="en-US" b="1" u="sng" dirty="0"/>
+              <a:t>March 10 &amp; 12 – Spring Break, No class</a:t>
+            </a:r>
           </a:p>
         </p:txBody>
       </p:sp>
@@ -7012,13 +6950,7 @@
       </p:grpSpPr>
       <p:sp>
         <p:nvSpPr>
-          <p:cNvPr id="2" name="Title 1">
-            <a:extLst>
-              <a:ext uri="{FF2B5EF4-FFF2-40B4-BE49-F238E27FC236}">
-                <a16:creationId xmlns:a16="http://schemas.microsoft.com/office/drawing/2014/main" id="{6C34F447-9258-3717-3A9E-85297EEC15F7}"/>
-              </a:ext>
-            </a:extLst>
-          </p:cNvPr>
+          <p:cNvPr id="2" name="Title 1"/>
           <p:cNvSpPr>
             <a:spLocks noGrp="1"/>
           </p:cNvSpPr>
@@ -7033,20 +6965,14 @@
           <a:p>
             <a:r>
               <a:rPr lang="en-US" dirty="0"/>
-              <a:t>Housekeeping! </a:t>
-            </a:r>
-          </a:p>
-        </p:txBody>
-      </p:sp>
-      <p:sp>
-        <p:nvSpPr>
-          <p:cNvPr id="3" name="Content Placeholder 2">
-            <a:extLst>
-              <a:ext uri="{FF2B5EF4-FFF2-40B4-BE49-F238E27FC236}">
-                <a16:creationId xmlns:a16="http://schemas.microsoft.com/office/drawing/2014/main" id="{C651EFF7-8AD3-C6FB-78B4-E86BFD75299F}"/>
-              </a:ext>
-            </a:extLst>
-          </p:cNvPr>
+              <a:t>Fisher’s exact test</a:t>
+            </a:r>
+          </a:p>
+        </p:txBody>
+      </p:sp>
+      <p:sp>
+        <p:nvSpPr>
+          <p:cNvPr id="3" name="Content Placeholder 2"/>
           <p:cNvSpPr>
             <a:spLocks noGrp="1"/>
           </p:cNvSpPr>
@@ -7061,101 +6987,37 @@
           <a:p>
             <a:r>
               <a:rPr lang="en-US" dirty="0"/>
-              <a:t>Add </a:t>
-            </a:r>
-            <a:r>
-              <a:rPr lang="en-US" dirty="0" err="1"/>
-              <a:t>nicholelaggan</a:t>
-            </a:r>
-            <a:r>
-              <a:rPr lang="en-US" dirty="0"/>
-              <a:t> to your GitHub repo!!</a:t>
-            </a:r>
-          </a:p>
-          <a:p>
-            <a:pPr marL="0" indent="0">
-              <a:buNone/>
-            </a:pPr>
+              <a:t>The fisher’s exact test is a test to analyze contingency tables (e.g. 2 x 2) tables of categorical count data</a:t>
+            </a:r>
+          </a:p>
+          <a:p>
             <a:endParaRPr lang="en-US" dirty="0"/>
           </a:p>
           <a:p>
-            <a:pPr marL="514350" indent="-514350">
-              <a:buAutoNum type="arabicPeriod"/>
-            </a:pPr>
-            <a:r>
-              <a:rPr lang="en-US" b="1" dirty="0"/>
-              <a:t>Go to your </a:t>
-            </a:r>
-            <a:r>
-              <a:rPr lang="en-US" b="1" dirty="0" err="1"/>
-              <a:t>Github</a:t>
-            </a:r>
-            <a:r>
-              <a:rPr lang="en-US" b="1" dirty="0"/>
-              <a:t> repo</a:t>
-            </a:r>
-          </a:p>
-          <a:p>
-            <a:pPr marL="514350" indent="-514350">
-              <a:buAutoNum type="arabicPeriod"/>
-            </a:pPr>
-            <a:r>
-              <a:rPr lang="en-US" b="1" dirty="0"/>
-              <a:t>Click Settings </a:t>
-            </a:r>
-            <a:r>
-              <a:rPr lang="en-US" b="1" dirty="0">
-                <a:sym typeface="Wingdings" pitchFamily="2" charset="2"/>
-              </a:rPr>
-              <a:t> </a:t>
-            </a:r>
-            <a:r>
-              <a:rPr lang="en-US" b="1" dirty="0"/>
-              <a:t>collaborators and team </a:t>
-            </a:r>
-            <a:r>
-              <a:rPr lang="en-US" b="1" dirty="0">
-                <a:sym typeface="Wingdings" pitchFamily="2" charset="2"/>
-              </a:rPr>
-              <a:t> add people</a:t>
-            </a:r>
-            <a:endParaRPr lang="en-US" b="1" dirty="0"/>
-          </a:p>
-          <a:p>
-            <a:pPr marL="514350" indent="-514350">
-              <a:buAutoNum type="arabicPeriod"/>
-            </a:pPr>
-            <a:r>
-              <a:rPr lang="en-US" b="1" dirty="0"/>
-              <a:t>Search for </a:t>
-            </a:r>
-            <a:r>
-              <a:rPr lang="en-US" b="1" dirty="0" err="1"/>
-              <a:t>nicholelaggan</a:t>
-            </a:r>
-            <a:endParaRPr lang="en-US" b="1" dirty="0"/>
-          </a:p>
-          <a:p>
-            <a:pPr marL="514350" indent="-514350">
-              <a:buAutoNum type="arabicPeriod"/>
-            </a:pPr>
-            <a:r>
-              <a:rPr lang="en-US" b="1" dirty="0"/>
-              <a:t>Authorize Admin access</a:t>
-            </a:r>
-          </a:p>
-          <a:p>
-            <a:pPr marL="0" indent="0">
-              <a:buNone/>
-            </a:pPr>
-            <a:endParaRPr lang="en-US" b="1" dirty="0"/>
+            <a:r>
+              <a:rPr lang="en-US" dirty="0"/>
+              <a:t>It’s good for small samples and unbalanced designs (e.g. the numbers in each group are not equal)</a:t>
+            </a:r>
+            <a:br>
+              <a:rPr lang="en-US" dirty="0"/>
+            </a:br>
+            <a:endParaRPr lang="en-US" dirty="0"/>
+          </a:p>
+          <a:p>
+            <a:r>
+              <a:rPr lang="en-US" dirty="0"/>
+              <a:t>It uses a quasi-permutation approach to calculate an exact p-value</a:t>
+            </a:r>
+          </a:p>
+          <a:p>
+            <a:endParaRPr lang="en-US" dirty="0"/>
           </a:p>
         </p:txBody>
       </p:sp>
     </p:spTree>
     <p:extLst>
       <p:ext uri="{BB962C8B-B14F-4D97-AF65-F5344CB8AC3E}">
-        <p14:creationId xmlns:p14="http://schemas.microsoft.com/office/powerpoint/2010/main" val="4084582457"/>
+        <p14:creationId xmlns:p14="http://schemas.microsoft.com/office/powerpoint/2010/main" val="174052823"/>
       </p:ext>
     </p:extLst>
   </p:cSld>
@@ -7198,9 +7060,10 @@
           <a:lstStyle/>
           <a:p>
             <a:r>
-              <a:rPr lang="en-US" dirty="0"/>
-              <a:t>Fisher’s exact test</a:t>
-            </a:r>
+              <a:rPr lang="en-US"/>
+              <a:t>Fisher test example</a:t>
+            </a:r>
+            <a:endParaRPr lang="en-US" dirty="0"/>
           </a:p>
         </p:txBody>
       </p:sp>
@@ -7216,12 +7079,14 @@
         </p:nvSpPr>
         <p:spPr/>
         <p:txBody>
-          <a:bodyPr/>
-          <a:lstStyle/>
-          <a:p>
-            <a:r>
-              <a:rPr lang="en-US" dirty="0"/>
-              <a:t>The fisher’s exact test is a test to analyze contingency tables (e.g. 2 x 2) tables of categorical count data</a:t>
+          <a:bodyPr>
+            <a:normAutofit fontScale="92500" lnSpcReduction="10000"/>
+          </a:bodyPr>
+          <a:lstStyle/>
+          <a:p>
+            <a:r>
+              <a:rPr lang="en-US" dirty="0"/>
+              <a:t>Pinnacles National Park has two different entrances that are unconnected. We went to the east side of Pinnacles 11 times, and 10 of 11 times we saw condors. We went to the west side of Pinnacle 8 times, and 1 of 8 times we saw condors. Is there a statistically significant difference in condor sightings? </a:t>
             </a:r>
           </a:p>
           <a:p>
@@ -7230,28 +7095,24 @@
           <a:p>
             <a:r>
               <a:rPr lang="en-US" dirty="0"/>
-              <a:t>It’s good for small samples and unbalanced designs (e.g. the numbers in each group are not equal)</a:t>
-            </a:r>
-            <a:br>
-              <a:rPr lang="en-US" dirty="0"/>
-            </a:br>
+              <a:t>Interpretation: Null hypothesis is that the probability is equal. A p-value &lt; 0.05 tells you that the east and west sides differ in the probability of detecting condors</a:t>
+            </a:r>
+          </a:p>
+          <a:p>
             <a:endParaRPr lang="en-US" dirty="0"/>
           </a:p>
           <a:p>
             <a:r>
               <a:rPr lang="en-US" dirty="0"/>
-              <a:t>It uses a quasi-permutation approach to calculate an exact p-value</a:t>
-            </a:r>
-          </a:p>
-          <a:p>
-            <a:endParaRPr lang="en-US" dirty="0"/>
+              <a:t>Go to R…</a:t>
+            </a:r>
           </a:p>
         </p:txBody>
       </p:sp>
     </p:spTree>
     <p:extLst>
       <p:ext uri="{BB962C8B-B14F-4D97-AF65-F5344CB8AC3E}">
-        <p14:creationId xmlns:p14="http://schemas.microsoft.com/office/powerpoint/2010/main" val="174052823"/>
+        <p14:creationId xmlns:p14="http://schemas.microsoft.com/office/powerpoint/2010/main" val="459422531"/>
       </p:ext>
     </p:extLst>
   </p:cSld>
@@ -7294,101 +7155,6 @@
           <a:lstStyle/>
           <a:p>
             <a:r>
-              <a:rPr lang="en-US"/>
-              <a:t>Fisher test example</a:t>
-            </a:r>
-            <a:endParaRPr lang="en-US" dirty="0"/>
-          </a:p>
-        </p:txBody>
-      </p:sp>
-      <p:sp>
-        <p:nvSpPr>
-          <p:cNvPr id="3" name="Content Placeholder 2"/>
-          <p:cNvSpPr>
-            <a:spLocks noGrp="1"/>
-          </p:cNvSpPr>
-          <p:nvPr>
-            <p:ph idx="1"/>
-          </p:nvPr>
-        </p:nvSpPr>
-        <p:spPr/>
-        <p:txBody>
-          <a:bodyPr>
-            <a:normAutofit fontScale="92500" lnSpcReduction="10000"/>
-          </a:bodyPr>
-          <a:lstStyle/>
-          <a:p>
-            <a:r>
-              <a:rPr lang="en-US" dirty="0"/>
-              <a:t>Pinnacles National Park has two different entrances that are unconnected. We went to the east side of Pinnacles 11 times, and 10 of 11 times we saw condors. We went to the west side of Pinnacle 8 times, and 1 of 8 times we saw condors. Is there a statistically significant difference in condor sightings? </a:t>
-            </a:r>
-          </a:p>
-          <a:p>
-            <a:endParaRPr lang="en-US" dirty="0"/>
-          </a:p>
-          <a:p>
-            <a:r>
-              <a:rPr lang="en-US" dirty="0"/>
-              <a:t>Interpretation: Null hypothesis is that the probability is equal. A p-value &lt; 0.05 tells you that the east and west sides differ in the probability of detecting condors</a:t>
-            </a:r>
-          </a:p>
-          <a:p>
-            <a:endParaRPr lang="en-US" dirty="0"/>
-          </a:p>
-          <a:p>
-            <a:r>
-              <a:rPr lang="en-US" dirty="0"/>
-              <a:t>Go to R…</a:t>
-            </a:r>
-          </a:p>
-        </p:txBody>
-      </p:sp>
-    </p:spTree>
-    <p:extLst>
-      <p:ext uri="{BB962C8B-B14F-4D97-AF65-F5344CB8AC3E}">
-        <p14:creationId xmlns:p14="http://schemas.microsoft.com/office/powerpoint/2010/main" val="459422531"/>
-      </p:ext>
-    </p:extLst>
-  </p:cSld>
-  <p:clrMapOvr>
-    <a:masterClrMapping/>
-  </p:clrMapOvr>
-</p:sld>
-</file>
-
-<file path=ppt/slides/slide36.xml><?xml version="1.0" encoding="utf-8"?>
-<p:sld xmlns:a="http://schemas.openxmlformats.org/drawingml/2006/main" xmlns:r="http://schemas.openxmlformats.org/officeDocument/2006/relationships" xmlns:p="http://schemas.openxmlformats.org/presentationml/2006/main">
-  <p:cSld>
-    <p:spTree>
-      <p:nvGrpSpPr>
-        <p:cNvPr id="1" name=""/>
-        <p:cNvGrpSpPr/>
-        <p:nvPr/>
-      </p:nvGrpSpPr>
-      <p:grpSpPr>
-        <a:xfrm>
-          <a:off x="0" y="0"/>
-          <a:ext cx="0" cy="0"/>
-          <a:chOff x="0" y="0"/>
-          <a:chExt cx="0" cy="0"/>
-        </a:xfrm>
-      </p:grpSpPr>
-      <p:sp>
-        <p:nvSpPr>
-          <p:cNvPr id="2" name="Title 1"/>
-          <p:cNvSpPr>
-            <a:spLocks noGrp="1"/>
-          </p:cNvSpPr>
-          <p:nvPr>
-            <p:ph type="title"/>
-          </p:nvPr>
-        </p:nvSpPr>
-        <p:spPr/>
-        <p:txBody>
-          <a:bodyPr/>
-          <a:lstStyle/>
-          <a:p>
-            <a:r>
               <a:rPr lang="en-US" dirty="0"/>
               <a:t>Rank tests</a:t>
             </a:r>
@@ -7504,7 +7270,7 @@
 </p:sld>
 </file>
 
-<file path=ppt/slides/slide37.xml><?xml version="1.0" encoding="utf-8"?>
+<file path=ppt/slides/slide36.xml><?xml version="1.0" encoding="utf-8"?>
 <p:sld xmlns:a="http://schemas.openxmlformats.org/drawingml/2006/main" xmlns:r="http://schemas.openxmlformats.org/officeDocument/2006/relationships" xmlns:p="http://schemas.openxmlformats.org/presentationml/2006/main">
   <p:cSld>
     <p:spTree>

--- a/lectures/week_5_tests/le_5_tests.pptx
+++ b/lectures/week_5_tests/le_5_tests.pptx
@@ -5,7 +5,7 @@
     <p:sldMasterId id="2147483648" r:id="rId1"/>
   </p:sldMasterIdLst>
   <p:notesMasterIdLst>
-    <p:notesMasterId r:id="rId38"/>
+    <p:notesMasterId r:id="rId39"/>
   </p:notesMasterIdLst>
   <p:sldIdLst>
     <p:sldId id="256" r:id="rId2"/>
@@ -39,11 +39,12 @@
     <p:sldId id="295" r:id="rId30"/>
     <p:sldId id="296" r:id="rId31"/>
     <p:sldId id="297" r:id="rId32"/>
-    <p:sldId id="274" r:id="rId33"/>
-    <p:sldId id="275" r:id="rId34"/>
-    <p:sldId id="299" r:id="rId35"/>
-    <p:sldId id="304" r:id="rId36"/>
-    <p:sldId id="303" r:id="rId37"/>
+    <p:sldId id="308" r:id="rId33"/>
+    <p:sldId id="274" r:id="rId34"/>
+    <p:sldId id="275" r:id="rId35"/>
+    <p:sldId id="299" r:id="rId36"/>
+    <p:sldId id="304" r:id="rId37"/>
+    <p:sldId id="303" r:id="rId38"/>
   </p:sldIdLst>
   <p:sldSz cx="12192000" cy="6858000"/>
   <p:notesSz cx="6858000" cy="9144000"/>
@@ -232,7 +233,7 @@
           <a:p>
             <a:fld id="{6EBC5869-D15C-3840-B050-90A5C35E6518}" type="datetimeFigureOut">
               <a:rPr lang="en-US" smtClean="0"/>
-              <a:t>2/24/26</a:t>
+              <a:t>2/25/26</a:t>
             </a:fld>
             <a:endParaRPr lang="en-US"/>
           </a:p>
@@ -1099,7 +1100,7 @@
           <a:p>
             <a:fld id="{3FFC207A-36A1-3243-A33F-1510AFB24BC1}" type="slidenum">
               <a:rPr lang="en-US" smtClean="0"/>
-              <a:t>35</a:t>
+              <a:t>36</a:t>
             </a:fld>
             <a:endParaRPr lang="en-US"/>
           </a:p>
@@ -1247,7 +1248,7 @@
           <a:p>
             <a:fld id="{7D5693D1-C5E8-7D40-8B0E-476CF8AD55E4}" type="datetimeFigureOut">
               <a:rPr lang="en-US" smtClean="0"/>
-              <a:t>2/24/26</a:t>
+              <a:t>2/25/26</a:t>
             </a:fld>
             <a:endParaRPr lang="en-US"/>
           </a:p>
@@ -1415,7 +1416,7 @@
           <a:p>
             <a:fld id="{7D5693D1-C5E8-7D40-8B0E-476CF8AD55E4}" type="datetimeFigureOut">
               <a:rPr lang="en-US" smtClean="0"/>
-              <a:t>2/24/26</a:t>
+              <a:t>2/25/26</a:t>
             </a:fld>
             <a:endParaRPr lang="en-US"/>
           </a:p>
@@ -1593,7 +1594,7 @@
           <a:p>
             <a:fld id="{7D5693D1-C5E8-7D40-8B0E-476CF8AD55E4}" type="datetimeFigureOut">
               <a:rPr lang="en-US" smtClean="0"/>
-              <a:t>2/24/26</a:t>
+              <a:t>2/25/26</a:t>
             </a:fld>
             <a:endParaRPr lang="en-US"/>
           </a:p>
@@ -1761,7 +1762,7 @@
           <a:p>
             <a:fld id="{7D5693D1-C5E8-7D40-8B0E-476CF8AD55E4}" type="datetimeFigureOut">
               <a:rPr lang="en-US" smtClean="0"/>
-              <a:t>2/24/26</a:t>
+              <a:t>2/25/26</a:t>
             </a:fld>
             <a:endParaRPr lang="en-US"/>
           </a:p>
@@ -2006,7 +2007,7 @@
           <a:p>
             <a:fld id="{7D5693D1-C5E8-7D40-8B0E-476CF8AD55E4}" type="datetimeFigureOut">
               <a:rPr lang="en-US" smtClean="0"/>
-              <a:t>2/24/26</a:t>
+              <a:t>2/25/26</a:t>
             </a:fld>
             <a:endParaRPr lang="en-US"/>
           </a:p>
@@ -2235,7 +2236,7 @@
           <a:p>
             <a:fld id="{7D5693D1-C5E8-7D40-8B0E-476CF8AD55E4}" type="datetimeFigureOut">
               <a:rPr lang="en-US" smtClean="0"/>
-              <a:t>2/24/26</a:t>
+              <a:t>2/25/26</a:t>
             </a:fld>
             <a:endParaRPr lang="en-US"/>
           </a:p>
@@ -2599,7 +2600,7 @@
           <a:p>
             <a:fld id="{7D5693D1-C5E8-7D40-8B0E-476CF8AD55E4}" type="datetimeFigureOut">
               <a:rPr lang="en-US" smtClean="0"/>
-              <a:t>2/24/26</a:t>
+              <a:t>2/25/26</a:t>
             </a:fld>
             <a:endParaRPr lang="en-US"/>
           </a:p>
@@ -2716,7 +2717,7 @@
           <a:p>
             <a:fld id="{7D5693D1-C5E8-7D40-8B0E-476CF8AD55E4}" type="datetimeFigureOut">
               <a:rPr lang="en-US" smtClean="0"/>
-              <a:t>2/24/26</a:t>
+              <a:t>2/25/26</a:t>
             </a:fld>
             <a:endParaRPr lang="en-US"/>
           </a:p>
@@ -2811,7 +2812,7 @@
           <a:p>
             <a:fld id="{7D5693D1-C5E8-7D40-8B0E-476CF8AD55E4}" type="datetimeFigureOut">
               <a:rPr lang="en-US" smtClean="0"/>
-              <a:t>2/24/26</a:t>
+              <a:t>2/25/26</a:t>
             </a:fld>
             <a:endParaRPr lang="en-US"/>
           </a:p>
@@ -3086,7 +3087,7 @@
           <a:p>
             <a:fld id="{7D5693D1-C5E8-7D40-8B0E-476CF8AD55E4}" type="datetimeFigureOut">
               <a:rPr lang="en-US" smtClean="0"/>
-              <a:t>2/24/26</a:t>
+              <a:t>2/25/26</a:t>
             </a:fld>
             <a:endParaRPr lang="en-US"/>
           </a:p>
@@ -3338,7 +3339,7 @@
           <a:p>
             <a:fld id="{7D5693D1-C5E8-7D40-8B0E-476CF8AD55E4}" type="datetimeFigureOut">
               <a:rPr lang="en-US" smtClean="0"/>
-              <a:t>2/24/26</a:t>
+              <a:t>2/25/26</a:t>
             </a:fld>
             <a:endParaRPr lang="en-US"/>
           </a:p>
@@ -3549,7 +3550,7 @@
           <a:p>
             <a:fld id="{7D5693D1-C5E8-7D40-8B0E-476CF8AD55E4}" type="datetimeFigureOut">
               <a:rPr lang="en-US" smtClean="0"/>
-              <a:t>2/24/26</a:t>
+              <a:t>2/25/26</a:t>
             </a:fld>
             <a:endParaRPr lang="en-US"/>
           </a:p>
@@ -6822,7 +6823,13 @@
       </p:grpSpPr>
       <p:sp>
         <p:nvSpPr>
-          <p:cNvPr id="2" name="Title 1"/>
+          <p:cNvPr id="2" name="Title 1">
+            <a:extLst>
+              <a:ext uri="{FF2B5EF4-FFF2-40B4-BE49-F238E27FC236}">
+                <a16:creationId xmlns:a16="http://schemas.microsoft.com/office/drawing/2014/main" id="{8FCEE277-5DFE-38F0-A914-6FBBAD0E7D3E}"/>
+              </a:ext>
+            </a:extLst>
+          </p:cNvPr>
           <p:cNvSpPr>
             <a:spLocks noGrp="1"/>
           </p:cNvSpPr>
@@ -6837,14 +6844,20 @@
           <a:p>
             <a:r>
               <a:rPr lang="en-US" dirty="0"/>
-              <a:t>Mantel test</a:t>
-            </a:r>
-          </a:p>
-        </p:txBody>
-      </p:sp>
-      <p:sp>
-        <p:nvSpPr>
-          <p:cNvPr id="3" name="Content Placeholder 2"/>
+              <a:t>STOPPED HERE</a:t>
+            </a:r>
+          </a:p>
+        </p:txBody>
+      </p:sp>
+      <p:sp>
+        <p:nvSpPr>
+          <p:cNvPr id="3" name="Content Placeholder 2">
+            <a:extLst>
+              <a:ext uri="{FF2B5EF4-FFF2-40B4-BE49-F238E27FC236}">
+                <a16:creationId xmlns:a16="http://schemas.microsoft.com/office/drawing/2014/main" id="{09D0ACEC-6C0B-C247-B16E-03469F46EA7A}"/>
+              </a:ext>
+            </a:extLst>
+          </p:cNvPr>
           <p:cNvSpPr>
             <a:spLocks noGrp="1"/>
           </p:cNvSpPr>
@@ -6852,67 +6865,10 @@
             <p:ph idx="1"/>
           </p:nvPr>
         </p:nvSpPr>
-        <p:spPr>
-          <a:xfrm>
-            <a:off x="838200" y="1548384"/>
-            <a:ext cx="10515600" cy="4628579"/>
-          </a:xfrm>
-        </p:spPr>
-        <p:txBody>
-          <a:bodyPr>
-            <a:normAutofit fontScale="85000" lnSpcReduction="20000"/>
-          </a:bodyPr>
-          <a:lstStyle/>
-          <a:p>
-            <a:r>
-              <a:rPr lang="en-US" dirty="0"/>
-              <a:t>This is a statistical test of the correlation between two matrices of the same dimension</a:t>
-            </a:r>
-          </a:p>
-          <a:p>
-            <a:endParaRPr lang="en-US" dirty="0"/>
-          </a:p>
-          <a:p>
-            <a:r>
-              <a:rPr lang="en-US" dirty="0"/>
-              <a:t>They are most frequently used in ecology where the data are distances between objects</a:t>
-            </a:r>
-          </a:p>
-          <a:p>
-            <a:pPr lvl="1"/>
-            <a:r>
-              <a:rPr lang="en-US" dirty="0"/>
-              <a:t>You might use a mantel test to see if your data are spatially autocorrelated</a:t>
-            </a:r>
-          </a:p>
-          <a:p>
-            <a:endParaRPr lang="en-US" dirty="0"/>
-          </a:p>
-          <a:p>
-            <a:r>
-              <a:rPr lang="en-US" dirty="0"/>
-              <a:t>For example, you might have one dataset which is a matrix of genetic distances, and one matrix with geographic distances between the range of species to each other species</a:t>
-            </a:r>
-          </a:p>
-          <a:p>
-            <a:endParaRPr lang="en-US" dirty="0"/>
-          </a:p>
-          <a:p>
-            <a:r>
-              <a:rPr lang="en-US" dirty="0"/>
-              <a:t>Here is some helpful info on how to do one: </a:t>
-            </a:r>
-            <a:r>
-              <a:rPr lang="en-US" dirty="0">
-                <a:hlinkClick r:id="rId2"/>
-              </a:rPr>
-              <a:t>https://stats.idre.ucla.edu/r/faq/how-can-i-perform-a-mantel-test-in-r/</a:t>
-            </a:r>
-            <a:r>
-              <a:rPr lang="en-US" dirty="0"/>
-              <a:t> </a:t>
-            </a:r>
-          </a:p>
+        <p:spPr/>
+        <p:txBody>
+          <a:bodyPr/>
+          <a:lstStyle/>
           <a:p>
             <a:endParaRPr lang="en-US" dirty="0"/>
           </a:p>
@@ -6921,7 +6877,7 @@
     </p:spTree>
     <p:extLst>
       <p:ext uri="{BB962C8B-B14F-4D97-AF65-F5344CB8AC3E}">
-        <p14:creationId xmlns:p14="http://schemas.microsoft.com/office/powerpoint/2010/main" val="416448812"/>
+        <p14:creationId xmlns:p14="http://schemas.microsoft.com/office/powerpoint/2010/main" val="2953171765"/>
       </p:ext>
     </p:extLst>
   </p:cSld>
@@ -6965,7 +6921,7 @@
           <a:p>
             <a:r>
               <a:rPr lang="en-US" dirty="0"/>
-              <a:t>Fisher’s exact test</a:t>
+              <a:t>Mantel test</a:t>
             </a:r>
           </a:p>
         </p:txBody>
@@ -6980,14 +6936,21 @@
             <p:ph idx="1"/>
           </p:nvPr>
         </p:nvSpPr>
-        <p:spPr/>
-        <p:txBody>
-          <a:bodyPr/>
-          <a:lstStyle/>
-          <a:p>
-            <a:r>
-              <a:rPr lang="en-US" dirty="0"/>
-              <a:t>The fisher’s exact test is a test to analyze contingency tables (e.g. 2 x 2) tables of categorical count data</a:t>
+        <p:spPr>
+          <a:xfrm>
+            <a:off x="838200" y="1548384"/>
+            <a:ext cx="10515600" cy="4628579"/>
+          </a:xfrm>
+        </p:spPr>
+        <p:txBody>
+          <a:bodyPr>
+            <a:normAutofit fontScale="85000" lnSpcReduction="20000"/>
+          </a:bodyPr>
+          <a:lstStyle/>
+          <a:p>
+            <a:r>
+              <a:rPr lang="en-US" dirty="0"/>
+              <a:t>This is a statistical test of the correlation between two matrices of the same dimension</a:t>
             </a:r>
           </a:p>
           <a:p>
@@ -6996,17 +6959,42 @@
           <a:p>
             <a:r>
               <a:rPr lang="en-US" dirty="0"/>
-              <a:t>It’s good for small samples and unbalanced designs (e.g. the numbers in each group are not equal)</a:t>
-            </a:r>
-            <a:br>
-              <a:rPr lang="en-US" dirty="0"/>
-            </a:br>
+              <a:t>They are most frequently used in ecology where the data are distances between objects</a:t>
+            </a:r>
+          </a:p>
+          <a:p>
+            <a:pPr lvl="1"/>
+            <a:r>
+              <a:rPr lang="en-US" dirty="0"/>
+              <a:t>You might use a mantel test to see if your data are spatially autocorrelated</a:t>
+            </a:r>
+          </a:p>
+          <a:p>
             <a:endParaRPr lang="en-US" dirty="0"/>
           </a:p>
           <a:p>
             <a:r>
               <a:rPr lang="en-US" dirty="0"/>
-              <a:t>It uses a quasi-permutation approach to calculate an exact p-value</a:t>
+              <a:t>For example, you might have one dataset which is a matrix of genetic distances, and one matrix with geographic distances between the range of species to each other species</a:t>
+            </a:r>
+          </a:p>
+          <a:p>
+            <a:endParaRPr lang="en-US" dirty="0"/>
+          </a:p>
+          <a:p>
+            <a:r>
+              <a:rPr lang="en-US" dirty="0"/>
+              <a:t>Here is some helpful info on how to do one: </a:t>
+            </a:r>
+            <a:r>
+              <a:rPr lang="en-US" dirty="0">
+                <a:hlinkClick r:id="rId2"/>
+              </a:rPr>
+              <a:t>https://stats.idre.ucla.edu/r/faq/how-can-i-perform-a-mantel-test-in-r/</a:t>
+            </a:r>
+            <a:r>
+              <a:rPr lang="en-US" dirty="0"/>
+              <a:t> </a:t>
             </a:r>
           </a:p>
           <a:p>
@@ -7017,7 +7005,7 @@
     </p:spTree>
     <p:extLst>
       <p:ext uri="{BB962C8B-B14F-4D97-AF65-F5344CB8AC3E}">
-        <p14:creationId xmlns:p14="http://schemas.microsoft.com/office/powerpoint/2010/main" val="174052823"/>
+        <p14:creationId xmlns:p14="http://schemas.microsoft.com/office/powerpoint/2010/main" val="416448812"/>
       </p:ext>
     </p:extLst>
   </p:cSld>
@@ -7060,59 +7048,60 @@
           <a:lstStyle/>
           <a:p>
             <a:r>
-              <a:rPr lang="en-US"/>
-              <a:t>Fisher test example</a:t>
-            </a:r>
+              <a:rPr lang="en-US" dirty="0"/>
+              <a:t>Fisher’s exact test</a:t>
+            </a:r>
+          </a:p>
+        </p:txBody>
+      </p:sp>
+      <p:sp>
+        <p:nvSpPr>
+          <p:cNvPr id="3" name="Content Placeholder 2"/>
+          <p:cNvSpPr>
+            <a:spLocks noGrp="1"/>
+          </p:cNvSpPr>
+          <p:nvPr>
+            <p:ph idx="1"/>
+          </p:nvPr>
+        </p:nvSpPr>
+        <p:spPr/>
+        <p:txBody>
+          <a:bodyPr/>
+          <a:lstStyle/>
+          <a:p>
+            <a:r>
+              <a:rPr lang="en-US" dirty="0"/>
+              <a:t>The fisher’s exact test is a test to analyze contingency tables (e.g. 2 x 2) tables of categorical count data</a:t>
+            </a:r>
+          </a:p>
+          <a:p>
             <a:endParaRPr lang="en-US" dirty="0"/>
           </a:p>
-        </p:txBody>
-      </p:sp>
-      <p:sp>
-        <p:nvSpPr>
-          <p:cNvPr id="3" name="Content Placeholder 2"/>
-          <p:cNvSpPr>
-            <a:spLocks noGrp="1"/>
-          </p:cNvSpPr>
-          <p:nvPr>
-            <p:ph idx="1"/>
-          </p:nvPr>
-        </p:nvSpPr>
-        <p:spPr/>
-        <p:txBody>
-          <a:bodyPr>
-            <a:normAutofit fontScale="92500" lnSpcReduction="10000"/>
-          </a:bodyPr>
-          <a:lstStyle/>
-          <a:p>
-            <a:r>
-              <a:rPr lang="en-US" dirty="0"/>
-              <a:t>Pinnacles National Park has two different entrances that are unconnected. We went to the east side of Pinnacles 11 times, and 10 of 11 times we saw condors. We went to the west side of Pinnacle 8 times, and 1 of 8 times we saw condors. Is there a statistically significant difference in condor sightings? </a:t>
-            </a:r>
-          </a:p>
-          <a:p>
+          <a:p>
+            <a:r>
+              <a:rPr lang="en-US" dirty="0"/>
+              <a:t>It’s good for small samples and unbalanced designs (e.g. the numbers in each group are not equal)</a:t>
+            </a:r>
+            <a:br>
+              <a:rPr lang="en-US" dirty="0"/>
+            </a:br>
             <a:endParaRPr lang="en-US" dirty="0"/>
           </a:p>
           <a:p>
             <a:r>
               <a:rPr lang="en-US" dirty="0"/>
-              <a:t>Interpretation: Null hypothesis is that the probability is equal. A p-value &lt; 0.05 tells you that the east and west sides differ in the probability of detecting condors</a:t>
+              <a:t>It uses a quasi-permutation approach to calculate an exact p-value</a:t>
             </a:r>
           </a:p>
           <a:p>
             <a:endParaRPr lang="en-US" dirty="0"/>
-          </a:p>
-          <a:p>
-            <a:r>
-              <a:rPr lang="en-US" dirty="0"/>
-              <a:t>Go to R…</a:t>
-            </a:r>
           </a:p>
         </p:txBody>
       </p:sp>
     </p:spTree>
     <p:extLst>
       <p:ext uri="{BB962C8B-B14F-4D97-AF65-F5344CB8AC3E}">
-        <p14:creationId xmlns:p14="http://schemas.microsoft.com/office/powerpoint/2010/main" val="459422531"/>
+        <p14:creationId xmlns:p14="http://schemas.microsoft.com/office/powerpoint/2010/main" val="174052823"/>
       </p:ext>
     </p:extLst>
   </p:cSld>
@@ -7155,9 +7144,10 @@
           <a:lstStyle/>
           <a:p>
             <a:r>
-              <a:rPr lang="en-US" dirty="0"/>
-              <a:t>Rank tests</a:t>
-            </a:r>
+              <a:rPr lang="en-US"/>
+              <a:t>Fisher test example</a:t>
+            </a:r>
+            <a:endParaRPr lang="en-US" dirty="0"/>
           </a:p>
         </p:txBody>
       </p:sp>
@@ -7171,31 +7161,16 @@
             <p:ph idx="1"/>
           </p:nvPr>
         </p:nvSpPr>
-        <p:spPr>
-          <a:xfrm>
-            <a:off x="838200" y="1731029"/>
-            <a:ext cx="10515600" cy="4351338"/>
-          </a:xfrm>
-        </p:spPr>
+        <p:spPr/>
         <p:txBody>
           <a:bodyPr>
-            <a:normAutofit fontScale="92500" lnSpcReduction="20000"/>
+            <a:normAutofit fontScale="92500" lnSpcReduction="10000"/>
           </a:bodyPr>
           <a:lstStyle/>
           <a:p>
             <a:r>
-              <a:rPr lang="en-US" b="1" u="sng" dirty="0"/>
-              <a:t>Wilcoxon Signed Rank Test</a:t>
-            </a:r>
-          </a:p>
-          <a:p>
-            <a:r>
-              <a:rPr lang="en-US" b="1" dirty="0"/>
-              <a:t>Non-parametric</a:t>
-            </a:r>
-            <a:r>
-              <a:rPr lang="en-US" dirty="0"/>
-              <a:t> test to compare two related samples to assess whether population ranks differ</a:t>
+              <a:rPr lang="en-US" dirty="0"/>
+              <a:t>Pinnacles National Park has two different entrances that are unconnected. We went to the east side of Pinnacles 11 times, and 10 of 11 times we saw condors. We went to the west side of Pinnacle 8 times, and 1 of 8 times we saw condors. Is there a statistically significant difference in condor sightings? </a:t>
             </a:r>
           </a:p>
           <a:p>
@@ -7204,15 +7179,7 @@
           <a:p>
             <a:r>
               <a:rPr lang="en-US" dirty="0"/>
-              <a:t>It the analogous to the </a:t>
-            </a:r>
-            <a:r>
-              <a:rPr lang="en-US" b="1" u="sng" dirty="0"/>
-              <a:t>paired</a:t>
-            </a:r>
-            <a:r>
-              <a:rPr lang="en-US" dirty="0"/>
-              <a:t> t-test, but for non-normal data (and isn’t as powerful)</a:t>
+              <a:t>Interpretation: Null hypothesis is that the probability is equal. A p-value &lt; 0.05 tells you that the east and west sides differ in the probability of detecting condors</a:t>
             </a:r>
           </a:p>
           <a:p>
@@ -7221,38 +7188,7 @@
           <a:p>
             <a:r>
               <a:rPr lang="en-US" dirty="0"/>
-              <a:t>The </a:t>
-            </a:r>
-            <a:r>
-              <a:rPr lang="en-US" u="sng" dirty="0"/>
-              <a:t>Wilcoxon rank sum test</a:t>
-            </a:r>
-            <a:r>
-              <a:rPr lang="en-US" dirty="0"/>
-              <a:t> is the non-parametric equivalent to the </a:t>
-            </a:r>
-            <a:r>
-              <a:rPr lang="en-US" b="1" u="sng" dirty="0"/>
-              <a:t>unpaired</a:t>
-            </a:r>
-            <a:r>
-              <a:rPr lang="en-US" b="1" dirty="0"/>
-              <a:t> </a:t>
-            </a:r>
-            <a:r>
-              <a:rPr lang="en-US" dirty="0"/>
-              <a:t>t-test. You can indicate which one you want by specifying paired or unpaired in R. </a:t>
-            </a:r>
-            <a:r>
-              <a:rPr lang="en-US" u="sng" dirty="0"/>
-              <a:t> </a:t>
-            </a:r>
-          </a:p>
-          <a:p>
-            <a:pPr lvl="1"/>
-            <a:r>
-              <a:rPr lang="en-US" dirty="0"/>
-              <a:t>This is also called the Mann-Whitney U test, the Mann-Whitney-Wilcoxon, or the Wilcoxon-Mann-Whitney</a:t>
+              <a:t>Go to R…</a:t>
             </a:r>
           </a:p>
         </p:txBody>
@@ -7260,7 +7196,7 @@
     </p:spTree>
     <p:extLst>
       <p:ext uri="{BB962C8B-B14F-4D97-AF65-F5344CB8AC3E}">
-        <p14:creationId xmlns:p14="http://schemas.microsoft.com/office/powerpoint/2010/main" val="923724335"/>
+        <p14:creationId xmlns:p14="http://schemas.microsoft.com/office/powerpoint/2010/main" val="459422531"/>
       </p:ext>
     </p:extLst>
   </p:cSld>
@@ -7302,6 +7238,154 @@
           <a:bodyPr/>
           <a:lstStyle/>
           <a:p>
+            <a:r>
+              <a:rPr lang="en-US" dirty="0"/>
+              <a:t>Rank tests</a:t>
+            </a:r>
+          </a:p>
+        </p:txBody>
+      </p:sp>
+      <p:sp>
+        <p:nvSpPr>
+          <p:cNvPr id="3" name="Content Placeholder 2"/>
+          <p:cNvSpPr>
+            <a:spLocks noGrp="1"/>
+          </p:cNvSpPr>
+          <p:nvPr>
+            <p:ph idx="1"/>
+          </p:nvPr>
+        </p:nvSpPr>
+        <p:spPr>
+          <a:xfrm>
+            <a:off x="838200" y="1731029"/>
+            <a:ext cx="10515600" cy="4351338"/>
+          </a:xfrm>
+        </p:spPr>
+        <p:txBody>
+          <a:bodyPr>
+            <a:normAutofit fontScale="92500" lnSpcReduction="20000"/>
+          </a:bodyPr>
+          <a:lstStyle/>
+          <a:p>
+            <a:r>
+              <a:rPr lang="en-US" b="1" u="sng" dirty="0"/>
+              <a:t>Wilcoxon Signed Rank Test</a:t>
+            </a:r>
+          </a:p>
+          <a:p>
+            <a:r>
+              <a:rPr lang="en-US" b="1" dirty="0"/>
+              <a:t>Non-parametric</a:t>
+            </a:r>
+            <a:r>
+              <a:rPr lang="en-US" dirty="0"/>
+              <a:t> test to compare two related samples to assess whether population ranks differ</a:t>
+            </a:r>
+          </a:p>
+          <a:p>
+            <a:endParaRPr lang="en-US" dirty="0"/>
+          </a:p>
+          <a:p>
+            <a:r>
+              <a:rPr lang="en-US" dirty="0"/>
+              <a:t>It the analogous to the </a:t>
+            </a:r>
+            <a:r>
+              <a:rPr lang="en-US" b="1" u="sng" dirty="0"/>
+              <a:t>paired</a:t>
+            </a:r>
+            <a:r>
+              <a:rPr lang="en-US" dirty="0"/>
+              <a:t> t-test, but for non-normal data (and isn’t as powerful)</a:t>
+            </a:r>
+          </a:p>
+          <a:p>
+            <a:endParaRPr lang="en-US" dirty="0"/>
+          </a:p>
+          <a:p>
+            <a:r>
+              <a:rPr lang="en-US" dirty="0"/>
+              <a:t>The </a:t>
+            </a:r>
+            <a:r>
+              <a:rPr lang="en-US" u="sng" dirty="0"/>
+              <a:t>Wilcoxon rank sum test</a:t>
+            </a:r>
+            <a:r>
+              <a:rPr lang="en-US" dirty="0"/>
+              <a:t> is the non-parametric equivalent to the </a:t>
+            </a:r>
+            <a:r>
+              <a:rPr lang="en-US" b="1" u="sng" dirty="0"/>
+              <a:t>unpaired</a:t>
+            </a:r>
+            <a:r>
+              <a:rPr lang="en-US" b="1" dirty="0"/>
+              <a:t> </a:t>
+            </a:r>
+            <a:r>
+              <a:rPr lang="en-US" dirty="0"/>
+              <a:t>t-test. You can indicate which one you want by specifying paired or unpaired in R. </a:t>
+            </a:r>
+            <a:r>
+              <a:rPr lang="en-US" u="sng" dirty="0"/>
+              <a:t> </a:t>
+            </a:r>
+          </a:p>
+          <a:p>
+            <a:pPr lvl="1"/>
+            <a:r>
+              <a:rPr lang="en-US" dirty="0"/>
+              <a:t>This is also called the Mann-Whitney U test, the Mann-Whitney-Wilcoxon, or the Wilcoxon-Mann-Whitney</a:t>
+            </a:r>
+          </a:p>
+        </p:txBody>
+      </p:sp>
+    </p:spTree>
+    <p:extLst>
+      <p:ext uri="{BB962C8B-B14F-4D97-AF65-F5344CB8AC3E}">
+        <p14:creationId xmlns:p14="http://schemas.microsoft.com/office/powerpoint/2010/main" val="923724335"/>
+      </p:ext>
+    </p:extLst>
+  </p:cSld>
+  <p:clrMapOvr>
+    <a:masterClrMapping/>
+  </p:clrMapOvr>
+</p:sld>
+</file>
+
+<file path=ppt/slides/slide37.xml><?xml version="1.0" encoding="utf-8"?>
+<p:sld xmlns:a="http://schemas.openxmlformats.org/drawingml/2006/main" xmlns:r="http://schemas.openxmlformats.org/officeDocument/2006/relationships" xmlns:p="http://schemas.openxmlformats.org/presentationml/2006/main">
+  <p:cSld>
+    <p:spTree>
+      <p:nvGrpSpPr>
+        <p:cNvPr id="1" name=""/>
+        <p:cNvGrpSpPr/>
+        <p:nvPr/>
+      </p:nvGrpSpPr>
+      <p:grpSpPr>
+        <a:xfrm>
+          <a:off x="0" y="0"/>
+          <a:ext cx="0" cy="0"/>
+          <a:chOff x="0" y="0"/>
+          <a:chExt cx="0" cy="0"/>
+        </a:xfrm>
+      </p:grpSpPr>
+      <p:sp>
+        <p:nvSpPr>
+          <p:cNvPr id="2" name="Title 1"/>
+          <p:cNvSpPr>
+            <a:spLocks noGrp="1"/>
+          </p:cNvSpPr>
+          <p:nvPr>
+            <p:ph type="title"/>
+          </p:nvPr>
+        </p:nvSpPr>
+        <p:spPr/>
+        <p:txBody>
+          <a:bodyPr/>
+          <a:lstStyle/>
+          <a:p>
             <a:pPr algn="ctr"/>
             <a:r>
               <a:rPr lang="en-US" dirty="0"/>
@@ -7400,7 +7484,7 @@
             </a:pPr>
             <a:r>
               <a:rPr lang="en-US" dirty="0"/>
-              <a:t>5. Advanced: Describe how you would test a third hypothesis with a permutation test. You don’t have to execute it, but think creatively about how to do. </a:t>
+              <a:t>5. Advanced: Describe how you would test a third hypothesis with a permutation test. You don’t have to execute it, but think creatively about how to do it. </a:t>
             </a:r>
           </a:p>
           <a:p>
@@ -7431,7 +7515,7 @@
             </a:r>
             <a:r>
               <a:rPr lang="en-US" b="1" u="sng" dirty="0"/>
-              <a:t>, (Enrollment status), DONE</a:t>
+              <a:t>, DONE</a:t>
             </a:r>
           </a:p>
         </p:txBody>
